--- a/keynote/答辩Keynote_李兆曦.pptx
+++ b/keynote/答辩Keynote_李兆曦.pptx
@@ -5332,7 +5332,7 @@
                 <a:ea typeface="PingFang SC"/>
                 <a:cs typeface="PingFang SC"/>
               </a:rPr>
-              <a:t>▸ 评测方式:红队与防御系统协同演化;攻击集分训练种子与未知攻击留出集</a:t>
+              <a:t>▸ 评测方式:红队与防御系统协同演化;攻击集分训练种子与预留的未知攻击</a:t>
             </a:r>
           </a:p>
           <a:p>
@@ -5395,7 +5395,7 @@
                 <a:ea typeface="PingFang SC"/>
                 <a:cs typeface="PingFang SC"/>
               </a:rPr>
-              <a:t>• 未知攻击(留出):随迭代的防御覆盖提升(衡量自主进化)</a:t>
+              <a:t>• 未知攻击(预留测试):随迭代的防御覆盖提升(衡量自主进化)</a:t>
             </a:r>
           </a:p>
           <a:p>
@@ -5664,7 +5664,7 @@
                 <a:ea typeface="PingFang SC"/>
                 <a:cs typeface="PingFang SC"/>
               </a:rPr>
-              <a:t>▸ 攻防协同演化评测基准:含未知攻击留出集,量化对已知/未知攻击的防御、误报与开销</a:t>
+              <a:t>▸ 攻防协同演化评测基准:含预留的未知攻击,量化对已知/未知攻击的防御、误报与开销</a:t>
             </a:r>
           </a:p>
         </p:txBody>

--- a/keynote/答辩Keynote_李兆曦.pptx
+++ b/keynote/答辩Keynote_李兆曦.pptx
@@ -3401,7 +3401,7 @@
                 <a:ea typeface="PingFang SC"/>
                 <a:cs typeface="PingFang SC"/>
               </a:rPr>
-              <a:t>相关工作(二):大模型用于安全 与 方法论</a:t>
+              <a:t>相关工作(二):大模型用于安全 / 编码智能体</a:t>
             </a:r>
           </a:p>
         </p:txBody>
@@ -3487,7 +3487,28 @@
                 <a:ea typeface="PingFang SC"/>
                 <a:cs typeface="PingFang SC"/>
               </a:rPr>
-              <a:t>• 合成 eBPF:Kgent / KEN——最直接对比基线,但一次性合成、非自主维护</a:t>
+              <a:t>• 合成 eBPF:Kgent / KEN——最直接对比基线,但一次性合成、不持续维护</a:t>
+            </a:r>
+          </a:p>
+          <a:p>
+            <a:pPr>
+              <a:lnSpc>
+                <a:spcPct val="112000"/>
+              </a:lnSpc>
+              <a:spcAft>
+                <a:spcPts val="600"/>
+              </a:spcAft>
+            </a:pPr>
+            <a:r>
+              <a:rPr sz="1800" b="1">
+                <a:solidFill>
+                  <a:srgbClr val="222222"/>
+                </a:solidFill>
+                <a:latin typeface="PingFang SC"/>
+                <a:ea typeface="PingFang SC"/>
+                <a:cs typeface="PingFang SC"/>
+              </a:rPr>
+              <a:t>▸ 编码智能体(工程载体)</a:t>
             </a:r>
           </a:p>
           <a:p>
@@ -3508,28 +3529,7 @@
                 <a:ea typeface="PingFang SC"/>
                 <a:cs typeface="PingFang SC"/>
               </a:rPr>
-              <a:t>• 工程载体:Claude Code/Cursor/Codex/Devin/SWE-agent——通用而非领域专用</a:t>
-            </a:r>
-          </a:p>
-          <a:p>
-            <a:pPr>
-              <a:lnSpc>
-                <a:spcPct val="112000"/>
-              </a:lnSpc>
-              <a:spcAft>
-                <a:spcPts val="600"/>
-              </a:spcAft>
-            </a:pPr>
-            <a:r>
-              <a:rPr sz="1800" b="1">
-                <a:solidFill>
-                  <a:srgbClr val="222222"/>
-                </a:solidFill>
-                <a:latin typeface="PingFang SC"/>
-                <a:ea typeface="PingFang SC"/>
-                <a:cs typeface="PingFang SC"/>
-              </a:rPr>
-              <a:t>▸ 方法论基础</a:t>
+              <a:t>• Claude Code/Cursor/Codex/Devin/SWE-agent:能自主写改调代码,但通用、不带内核/eBPF 领域工具——本文做专用 harness</a:t>
             </a:r>
           </a:p>
           <a:p>
@@ -3550,28 +3550,7 @@
                 <a:ea typeface="PingFang SC"/>
                 <a:cs typeface="PingFang SC"/>
               </a:rPr>
-              <a:t>• 非梯度演化;程序演化搜索(FunSearch、AlphaEvolve);自演化智能体(Darwin-Gödel)</a:t>
-            </a:r>
-          </a:p>
-          <a:p>
-            <a:pPr lvl="1">
-              <a:lnSpc>
-                <a:spcPct val="112000"/>
-              </a:lnSpc>
-              <a:spcAft>
-                <a:spcPts val="600"/>
-              </a:spcAft>
-            </a:pPr>
-            <a:r>
-              <a:rPr sz="1650" b="0">
-                <a:solidFill>
-                  <a:srgbClr val="222222"/>
-                </a:solidFill>
-                <a:latin typeface="PingFang SC"/>
-                <a:ea typeface="PingFang SC"/>
-                <a:cs typeface="PingFang SC"/>
-              </a:rPr>
-              <a:t>• 探索(ICM、RND)、多样化解集(Novelty Search、MAP-Elites)</a:t>
+              <a:t>• 迭代思路可借鉴 FunSearch、AlphaEvolve(让模型反复改代码、用测试反馈迭代)</a:t>
             </a:r>
           </a:p>
         </p:txBody>
@@ -4128,7 +4107,7 @@
                 <a:ea typeface="PingFang SC"/>
                 <a:cs typeface="PingFang SC"/>
               </a:rPr>
-              <a:t>核心思路:防御演化(Defensive Evolution)</a:t>
+              <a:t>总体思路:让智能体持续维护内核 eBPF 防御</a:t>
             </a:r>
           </a:p>
         </p:txBody>
@@ -4169,7 +4148,7 @@
                 <a:ea typeface="PingFang SC"/>
                 <a:cs typeface="PingFang SC"/>
               </a:rPr>
-              <a:t>让编码智能体持续维护并演化一套运行在内核的防御代码:把防御能力沉淀为“可验证的 eBPF 代码”(而非模型权重),随攻击出现不断增补、修正。</a:t>
+              <a:t>把“发现攻击 → 写/改 eBPF → 验证安全 → 加载 → 看效果 → 再改”做成一个自动闭环;防御以 eBPF 代码的形式不断积累在“防御库”里(项目内部也称“防御演化”)。</a:t>
             </a:r>
           </a:p>
         </p:txBody>
@@ -4213,7 +4192,7 @@
                 <a:ea typeface="PingFang SC"/>
                 <a:cs typeface="PingFang SC"/>
               </a:rPr>
-              <a:t>▸ 以可验证代码为载体的优势</a:t>
+              <a:t>▸ 为什么用“代码”而不是训练一个模型</a:t>
             </a:r>
           </a:p>
           <a:p>
@@ -4234,7 +4213,7 @@
                 <a:ea typeface="PingFang SC"/>
                 <a:cs typeface="PingFang SC"/>
               </a:rPr>
-              <a:t>• 容量无界(不受参数量限制)、抗灾难性遗忘(旧防御不被覆盖)</a:t>
+              <a:t>• 改一条、加一条,可积累、不遗忘;每条防御就是一段代码,看得懂、可审计</a:t>
             </a:r>
           </a:p>
           <a:p>
@@ -4255,7 +4234,7 @@
                 <a:ea typeface="PingFang SC"/>
                 <a:cs typeface="PingFang SC"/>
               </a:rPr>
-              <a:t>• 可解释(每条防御=一段代码)、线速执行(XDP)、可形式化验证(verifier)</a:t>
+              <a:t>• 跑在 XDP,线速;出错能回滚,verifier 保证不把内核搞挂</a:t>
             </a:r>
           </a:p>
         </p:txBody>
@@ -4354,7 +4333,7 @@
                 <a:ea typeface="PingFang SC"/>
                 <a:cs typeface="PingFang SC"/>
               </a:rPr>
-              <a:t>四项研究内容</a:t>
+              <a:t>研究内容(三项,落在系统上)</a:t>
             </a:r>
           </a:p>
         </p:txBody>
@@ -4398,7 +4377,7 @@
                 <a:ea typeface="PingFang SC"/>
                 <a:cs typeface="PingFang SC"/>
               </a:rPr>
-              <a:t>▸ 范式形式化 + 系统框架 + 专用 harness</a:t>
+              <a:t>▸ 把系统搭起来:智能体 + eBPF 工具链闭环</a:t>
             </a:r>
           </a:p>
           <a:p>
@@ -4419,7 +4398,7 @@
                 <a:ea typeface="PingFang SC"/>
                 <a:cs typeface="PingFang SC"/>
               </a:rPr>
-              <a:t>• 界定“以可验证代码为载体的演化”;把 eBPF 工具、verifier 反馈、沙箱、靶场、档案封装成智能体工具接口</a:t>
+              <a:t>• 在 PacketScope/Guarder 上,做一套让智能体能“生成 eBPF→编译→过 verifier→沙箱测试→加载→读遥测”的工具与闭环</a:t>
             </a:r>
           </a:p>
           <a:p>
@@ -4440,7 +4419,28 @@
                 <a:ea typeface="PingFang SC"/>
                 <a:cs typeface="PingFang SC"/>
               </a:rPr>
-              <a:t>▸ 攻击面探索:以新颖性与覆盖度为信号,发现现有防御覆盖不到的攻击</a:t>
+              <a:t>▸ 让智能体写出“能用且安全”的 eBPF</a:t>
+            </a:r>
+          </a:p>
+          <a:p>
+            <a:pPr lvl="1">
+              <a:lnSpc>
+                <a:spcPct val="112000"/>
+              </a:lnSpc>
+              <a:spcAft>
+                <a:spcPts val="600"/>
+              </a:spcAft>
+            </a:pPr>
+            <a:r>
+              <a:rPr sz="1650" b="0">
+                <a:solidFill>
+                  <a:srgbClr val="222222"/>
+                </a:solidFill>
+                <a:latin typeface="PingFang SC"/>
+                <a:ea typeface="PingFang SC"/>
+                <a:cs typeface="PingFang SC"/>
+              </a:rPr>
+              <a:t>• 解决生成质量(编得过、过 verifier、不误杀)与安全(出错自动回滚)——系统能跑起来的关键工程</a:t>
             </a:r>
           </a:p>
           <a:p>
@@ -4461,11 +4461,11 @@
                 <a:ea typeface="PingFang SC"/>
                 <a:cs typeface="PingFang SC"/>
               </a:rPr>
-              <a:t>▸ 进化式 eBPF 合成 + 可信加载闭环:大模型生成/改写,经多层验证后热加载</a:t>
-            </a:r>
-          </a:p>
-          <a:p>
-            <a:pPr>
+              <a:t>▸ 在真实协议攻击上做防御 + 评测</a:t>
+            </a:r>
+          </a:p>
+          <a:p>
+            <a:pPr lvl="1">
               <a:lnSpc>
                 <a:spcPct val="112000"/>
               </a:lnSpc>
@@ -4474,7 +4474,7 @@
               </a:spcAft>
             </a:pPr>
             <a:r>
-              <a:rPr sz="1800" b="1">
+              <a:rPr sz="1650" b="0">
                 <a:solidFill>
                   <a:srgbClr val="222222"/>
                 </a:solidFill>
@@ -4482,7 +4482,7 @@
                 <a:ea typeface="PingFang SC"/>
                 <a:cs typeface="PingFang SC"/>
               </a:rPr>
-              <a:t>▸ 防御库维护 + 攻防协同演化评测:沉淀多样化防御,量化对已知/未知攻击的防御</a:t>
+              <a:t>• 用 PMTUD/NAT/IPID 等真实攻击搭靶场,测检出率、误报率、性能开销,与人工规则/现有工具对比</a:t>
             </a:r>
           </a:p>
         </p:txBody>
@@ -5288,7 +5288,7 @@
                 <a:ea typeface="PingFang SC"/>
                 <a:cs typeface="PingFang SC"/>
               </a:rPr>
-              <a:t>评测设计:攻防协同演化</a:t>
+              <a:t>怎么评测</a:t>
             </a:r>
           </a:p>
         </p:txBody>
@@ -5332,7 +5332,7 @@
                 <a:ea typeface="PingFang SC"/>
                 <a:cs typeface="PingFang SC"/>
               </a:rPr>
-              <a:t>▸ 评测方式:红队与防御系统协同演化;攻击集分训练种子与预留的未知攻击</a:t>
+              <a:t>▸ 思路:用真实协议攻击搭靶场,让系统自动生成防御;并对“没见过的新攻击”单独测一遍</a:t>
             </a:r>
           </a:p>
           <a:p>
@@ -5353,7 +5353,7 @@
                 <a:ea typeface="PingFang SC"/>
                 <a:cs typeface="PingFang SC"/>
               </a:rPr>
-              <a:t>▸ 度量指标</a:t>
+              <a:t>▸ 看四个指标</a:t>
             </a:r>
           </a:p>
           <a:p>
@@ -5374,7 +5374,7 @@
                 <a:ea typeface="PingFang SC"/>
                 <a:cs typeface="PingFang SC"/>
               </a:rPr>
-              <a:t>• 已知攻击:检出率 / 误报率</a:t>
+              <a:t>• 防住没(检出率)、误杀多少(误报率)</a:t>
             </a:r>
           </a:p>
           <a:p>
@@ -5395,7 +5395,28 @@
                 <a:ea typeface="PingFang SC"/>
                 <a:cs typeface="PingFang SC"/>
               </a:rPr>
-              <a:t>• 未知攻击(预留测试):随迭代的防御覆盖提升(衡量自主进化)</a:t>
+              <a:t>• 开销(XDP 吞吐 / 时延)、要不要人工(自动化程度)</a:t>
+            </a:r>
+          </a:p>
+          <a:p>
+            <a:pPr>
+              <a:lnSpc>
+                <a:spcPct val="112000"/>
+              </a:lnSpc>
+              <a:spcAft>
+                <a:spcPts val="600"/>
+              </a:spcAft>
+            </a:pPr>
+            <a:r>
+              <a:rPr sz="1800" b="1">
+                <a:solidFill>
+                  <a:srgbClr val="222222"/>
+                </a:solidFill>
+                <a:latin typeface="PingFang SC"/>
+                <a:ea typeface="PingFang SC"/>
+                <a:cs typeface="PingFang SC"/>
+              </a:rPr>
+              <a:t>▸ 跟谁比</a:t>
             </a:r>
           </a:p>
           <a:p>
@@ -5416,70 +5437,7 @@
                 <a:ea typeface="PingFang SC"/>
                 <a:cs typeface="PingFang SC"/>
               </a:rPr>
-              <a:t>• 性能:XDP 吞吐损失 / 时延;自动化程度:人工介入量</a:t>
-            </a:r>
-          </a:p>
-          <a:p>
-            <a:pPr>
-              <a:lnSpc>
-                <a:spcPct val="112000"/>
-              </a:lnSpc>
-              <a:spcAft>
-                <a:spcPts val="600"/>
-              </a:spcAft>
-            </a:pPr>
-            <a:r>
-              <a:rPr sz="1800" b="1">
-                <a:solidFill>
-                  <a:srgbClr val="222222"/>
-                </a:solidFill>
-                <a:latin typeface="PingFang SC"/>
-                <a:ea typeface="PingFang SC"/>
-                <a:cs typeface="PingFang SC"/>
-              </a:rPr>
-              <a:t>▸ 对比与消融</a:t>
-            </a:r>
-          </a:p>
-          <a:p>
-            <a:pPr lvl="1">
-              <a:lnSpc>
-                <a:spcPct val="112000"/>
-              </a:lnSpc>
-              <a:spcAft>
-                <a:spcPts val="600"/>
-              </a:spcAft>
-            </a:pPr>
-            <a:r>
-              <a:rPr sz="1650" b="0">
-                <a:solidFill>
-                  <a:srgbClr val="222222"/>
-                </a:solidFill>
-                <a:latin typeface="PingFang SC"/>
-                <a:ea typeface="PingFang SC"/>
-                <a:cs typeface="PingFang SC"/>
-              </a:rPr>
-              <a:t>• 对比 Kgent/KEN(一次合成)、Tetragon/Falco(人工策略)</a:t>
-            </a:r>
-          </a:p>
-          <a:p>
-            <a:pPr lvl="1">
-              <a:lnSpc>
-                <a:spcPct val="112000"/>
-              </a:lnSpc>
-              <a:spcAft>
-                <a:spcPts val="600"/>
-              </a:spcAft>
-            </a:pPr>
-            <a:r>
-              <a:rPr sz="1650" b="0">
-                <a:solidFill>
-                  <a:srgbClr val="222222"/>
-                </a:solidFill>
-                <a:latin typeface="PingFang SC"/>
-                <a:ea typeface="PingFang SC"/>
-                <a:cs typeface="PingFang SC"/>
-              </a:rPr>
-              <a:t>• 消融:去探索 / 去档案 / 去自修正,验证各部件贡献</a:t>
+              <a:t>• 人工写的规则(现状)、Kgent/KEN(一次合成)、Tetragon/Falco(人工策略)</a:t>
             </a:r>
           </a:p>
         </p:txBody>
@@ -5591,7 +5549,7 @@
         </p:nvSpPr>
         <p:spPr>
           <a:xfrm>
-            <a:off x="640080" y="1371600"/>
+            <a:off x="640080" y="1463040"/>
             <a:ext cx="9977507604000" cy="4849538688000"/>
           </a:xfrm>
           <a:prstGeom prst="rect">
@@ -5614,7 +5572,7 @@
               </a:spcAft>
             </a:pPr>
             <a:r>
-              <a:rPr sz="2000" b="1">
+              <a:rPr sz="1900" b="1">
                 <a:solidFill>
                   <a:srgbClr val="222222"/>
                 </a:solidFill>
@@ -5622,7 +5580,7 @@
                 <a:ea typeface="PingFang SC"/>
                 <a:cs typeface="PingFang SC"/>
               </a:rPr>
-              <a:t>▸ 范式:让编码智能体持续维护与演化内核防御代码——防御沉淀为“可验证代码”而非模型权重(防御演化)</a:t>
+              <a:t>▸ 一套能跑起来的系统(而非设想):在 PacketScope/Guarder 上落地,让智能体自动维护内核 eBPF 防御,可演示可复现</a:t>
             </a:r>
           </a:p>
           <a:p>
@@ -5635,7 +5593,7 @@
               </a:spcAft>
             </a:pPr>
             <a:r>
-              <a:rPr sz="2000" b="1">
+              <a:rPr sz="1900" b="1">
                 <a:solidFill>
                   <a:srgbClr val="222222"/>
                 </a:solidFill>
@@ -5643,7 +5601,7 @@
                 <a:ea typeface="PingFang SC"/>
                 <a:cs typeface="PingFang SC"/>
               </a:rPr>
-              <a:t>▸ 专用 harness:为内核 eBPF 防御构建领域专用的智能体 harness(领域工具 + 反馈闭环),而非直接套用通用编码智能体</a:t>
+              <a:t>▸ 智能体写内核代码的可靠流水线:生成→编译→verifier→沙箱→加载→回滚,保证“AI 写的 eBPF”能用、且不把内核搞挂</a:t>
             </a:r>
           </a:p>
           <a:p>
@@ -5656,7 +5614,7 @@
               </a:spcAft>
             </a:pPr>
             <a:r>
-              <a:rPr sz="2000" b="1">
+              <a:rPr sz="1900" b="1">
                 <a:solidFill>
                   <a:srgbClr val="222222"/>
                 </a:solidFill>
@@ -5664,7 +5622,7 @@
                 <a:ea typeface="PingFang SC"/>
                 <a:cs typeface="PingFang SC"/>
               </a:rPr>
-              <a:t>▸ 攻防协同演化评测基准:含预留的未知攻击,量化对已知/未知攻击的防御、误报与开销</a:t>
+              <a:t>▸ 真实攻击的防御 + 评测靶场:用 PMTUD/NAT/IPID 等真实攻击,给出检出率/误报/开销,并与人工规则、现有工具对比</a:t>
             </a:r>
           </a:p>
         </p:txBody>
@@ -7741,7 +7699,7 @@
                 <a:ea typeface="PingFang SC"/>
                 <a:cs typeface="PingFang SC"/>
               </a:rPr>
-              <a:t>四项关键挑战</a:t>
+              <a:t>关键挑战(工程上)</a:t>
             </a:r>
           </a:p>
         </p:txBody>
@@ -7785,7 +7743,7 @@
                 <a:ea typeface="PingFang SC"/>
                 <a:cs typeface="PingFang SC"/>
               </a:rPr>
-              <a:t>▸ 可靠性:智能体写的内核代码若有缺陷可断网/误杀 → 先验证安全、后部署</a:t>
+              <a:t>▸ 可靠性:智能体写的内核代码若有缺陷可断网/误杀 → 先验证安全、再上线,出错能回滚</a:t>
             </a:r>
           </a:p>
           <a:p>
@@ -7806,7 +7764,7 @@
                 <a:ea typeface="PingFang SC"/>
                 <a:cs typeface="PingFang SC"/>
               </a:rPr>
-              <a:t>▸ 探索高效性:协议状态空间大且含噪,如何高效发现真正有价值的攻击面</a:t>
+              <a:t>▸ 生成质量:智能体写的 eBPF 要真能编过、过 verifier、且确实拦住攻击而不误杀</a:t>
             </a:r>
           </a:p>
           <a:p>
@@ -7827,28 +7785,7 @@
                 <a:ea typeface="PingFang SC"/>
                 <a:cs typeface="PingFang SC"/>
               </a:rPr>
-              <a:t>▸ 非梯度演化的收敛性:以代码为载体,如何单调进化、不腐化、不回退</a:t>
-            </a:r>
-          </a:p>
-          <a:p>
-            <a:pPr>
-              <a:lnSpc>
-                <a:spcPct val="112000"/>
-              </a:lnSpc>
-              <a:spcAft>
-                <a:spcPts val="600"/>
-              </a:spcAft>
-            </a:pPr>
-            <a:r>
-              <a:rPr sz="1800" b="1">
-                <a:solidFill>
-                  <a:srgbClr val="222222"/>
-                </a:solidFill>
-                <a:latin typeface="PingFang SC"/>
-                <a:ea typeface="PingFang SC"/>
-                <a:cs typeface="PingFang SC"/>
-              </a:rPr>
-              <a:t>▸ 评测:如何量化对“未知攻击”的自主防御能力,可复现可对比</a:t>
+              <a:t>▸ 评测:怎么证明真有用——见过的、没见过的攻击都能防,且开销可接受</a:t>
             </a:r>
           </a:p>
         </p:txBody>

--- a/keynote/答辩Keynote_李兆曦.pptx
+++ b/keynote/答辩Keynote_李兆曦.pptx
@@ -3529,7 +3529,7 @@
                 <a:ea typeface="PingFang SC"/>
                 <a:cs typeface="PingFang SC"/>
               </a:rPr>
-              <a:t>• Claude Code/Cursor/Codex/Devin/SWE-agent:能自主写改调代码,但通用、不带内核/eBPF 领域工具——本文做专用 harness</a:t>
+              <a:t>• Claude Code/Cursor/Codex/Devin/SWE-agent:已能自主编写、修改与调试代码,但属通用工具、不含内核/eBPF 领域能力——本文为此设计专用 harness</a:t>
             </a:r>
           </a:p>
           <a:p>
@@ -4107,7 +4107,7 @@
                 <a:ea typeface="PingFang SC"/>
                 <a:cs typeface="PingFang SC"/>
               </a:rPr>
-              <a:t>总体思路:让智能体持续维护内核 eBPF 防御</a:t>
+              <a:t>总体思路:由智能体持续维护内核 eBPF 防御</a:t>
             </a:r>
           </a:p>
         </p:txBody>
@@ -4148,7 +4148,7 @@
                 <a:ea typeface="PingFang SC"/>
                 <a:cs typeface="PingFang SC"/>
               </a:rPr>
-              <a:t>把“发现攻击 → 写/改 eBPF → 验证安全 → 加载 → 看效果 → 再改”做成一个自动闭环;防御以 eBPF 代码的形式不断积累在“防御库”里(项目内部也称“防御演化”)。</a:t>
+              <a:t>将“发现攻击 → 生成/修改 eBPF → 验证安全 → 加载 → 评估效果 → 迭代”组织为一个自动化闭环;防御能力以 eBPF 代码的形式持续积累于“防御库”中(本文称之为“防御演化”)。</a:t>
             </a:r>
           </a:p>
         </p:txBody>
@@ -4192,7 +4192,7 @@
                 <a:ea typeface="PingFang SC"/>
                 <a:cs typeface="PingFang SC"/>
               </a:rPr>
-              <a:t>▸ 为什么用“代码”而不是训练一个模型</a:t>
+              <a:t>▸ 为何以代码(而非模型权重)为载体</a:t>
             </a:r>
           </a:p>
           <a:p>
@@ -4213,7 +4213,7 @@
                 <a:ea typeface="PingFang SC"/>
                 <a:cs typeface="PingFang SC"/>
               </a:rPr>
-              <a:t>• 改一条、加一条,可积累、不遗忘;每条防御就是一段代码,看得懂、可审计</a:t>
+              <a:t>• 逐条增补与修正,可累积、不遗忘;每条防御对应一段代码,可读、可审计</a:t>
             </a:r>
           </a:p>
           <a:p>
@@ -4234,7 +4234,7 @@
                 <a:ea typeface="PingFang SC"/>
                 <a:cs typeface="PingFang SC"/>
               </a:rPr>
-              <a:t>• 跑在 XDP,线速;出错能回滚,verifier 保证不把内核搞挂</a:t>
+              <a:t>• 运行于 XDP,线速执行;出错可回滚,并由 verifier 保证不致内核崩溃</a:t>
             </a:r>
           </a:p>
         </p:txBody>
@@ -4333,7 +4333,7 @@
                 <a:ea typeface="PingFang SC"/>
                 <a:cs typeface="PingFang SC"/>
               </a:rPr>
-              <a:t>研究内容(三项,落在系统上)</a:t>
+              <a:t>主要研究内容(三项)</a:t>
             </a:r>
           </a:p>
         </p:txBody>
@@ -4377,7 +4377,7 @@
                 <a:ea typeface="PingFang SC"/>
                 <a:cs typeface="PingFang SC"/>
               </a:rPr>
-              <a:t>▸ 把系统搭起来:智能体 + eBPF 工具链闭环</a:t>
+              <a:t>▸ 系统构建:智能体与 eBPF 工具链闭环</a:t>
             </a:r>
           </a:p>
           <a:p>
@@ -4398,7 +4398,7 @@
                 <a:ea typeface="PingFang SC"/>
                 <a:cs typeface="PingFang SC"/>
               </a:rPr>
-              <a:t>• 在 PacketScope/Guarder 上,做一套让智能体能“生成 eBPF→编译→过 verifier→沙箱测试→加载→读遥测”的工具与闭环</a:t>
+              <a:t>• 在 PacketScope/Guarder 基础上,构建使智能体能够完成“生成 eBPF→编译→通过 verifier→沙箱测试→加载→读取遥测”的工具链与自动化闭环</a:t>
             </a:r>
           </a:p>
           <a:p>
@@ -4419,7 +4419,7 @@
                 <a:ea typeface="PingFang SC"/>
                 <a:cs typeface="PingFang SC"/>
               </a:rPr>
-              <a:t>▸ 让智能体写出“能用且安全”的 eBPF</a:t>
+              <a:t>▸ 生成“可用且安全”的 eBPF 防御</a:t>
             </a:r>
           </a:p>
           <a:p>
@@ -4440,7 +4440,7 @@
                 <a:ea typeface="PingFang SC"/>
                 <a:cs typeface="PingFang SC"/>
               </a:rPr>
-              <a:t>• 解决生成质量(编得过、过 verifier、不误杀)与安全(出错自动回滚)——系统能跑起来的关键工程</a:t>
+              <a:t>• 解决生成质量(可编译、通过 verifier、不误伤正常流量)与运行安全(异常时自动回滚)——系统得以运行的关键工程</a:t>
             </a:r>
           </a:p>
           <a:p>
@@ -4461,7 +4461,7 @@
                 <a:ea typeface="PingFang SC"/>
                 <a:cs typeface="PingFang SC"/>
               </a:rPr>
-              <a:t>▸ 在真实协议攻击上做防御 + 评测</a:t>
+              <a:t>▸ 面向真实协议攻击的防御与评测</a:t>
             </a:r>
           </a:p>
           <a:p>
@@ -4482,7 +4482,7 @@
                 <a:ea typeface="PingFang SC"/>
                 <a:cs typeface="PingFang SC"/>
               </a:rPr>
-              <a:t>• 用 PMTUD/NAT/IPID 等真实攻击搭靶场,测检出率、误报率、性能开销,与人工规则/现有工具对比</a:t>
+              <a:t>• 以 PMTUD/NAT/IPID 等真实攻击构建攻防靶场,度量检测率、误报率与性能开销,并与人工规则及现有工具对比</a:t>
             </a:r>
           </a:p>
         </p:txBody>
@@ -5288,7 +5288,7 @@
                 <a:ea typeface="PingFang SC"/>
                 <a:cs typeface="PingFang SC"/>
               </a:rPr>
-              <a:t>怎么评测</a:t>
+              <a:t>评测方法</a:t>
             </a:r>
           </a:p>
         </p:txBody>
@@ -5332,7 +5332,7 @@
                 <a:ea typeface="PingFang SC"/>
                 <a:cs typeface="PingFang SC"/>
               </a:rPr>
-              <a:t>▸ 思路:用真实协议攻击搭靶场,让系统自动生成防御;并对“没见过的新攻击”单独测一遍</a:t>
+              <a:t>▸ 思路:以真实协议攻击构建攻防靶场,由系统自动生成防御;并对未参与迭代的未知攻击单独评测</a:t>
             </a:r>
           </a:p>
           <a:p>
@@ -5353,7 +5353,7 @@
                 <a:ea typeface="PingFang SC"/>
                 <a:cs typeface="PingFang SC"/>
               </a:rPr>
-              <a:t>▸ 看四个指标</a:t>
+              <a:t>▸ 度量指标</a:t>
             </a:r>
           </a:p>
           <a:p>
@@ -5374,7 +5374,7 @@
                 <a:ea typeface="PingFang SC"/>
                 <a:cs typeface="PingFang SC"/>
               </a:rPr>
-              <a:t>• 防住没(检出率)、误杀多少(误报率)</a:t>
+              <a:t>• 检测率(是否成功拦截)、误报率(误伤正常流量)</a:t>
             </a:r>
           </a:p>
           <a:p>
@@ -5395,7 +5395,7 @@
                 <a:ea typeface="PingFang SC"/>
                 <a:cs typeface="PingFang SC"/>
               </a:rPr>
-              <a:t>• 开销(XDP 吞吐 / 时延)、要不要人工(自动化程度)</a:t>
+              <a:t>• 性能开销(XDP 吞吐 / 时延)、自动化程度(人工介入量)</a:t>
             </a:r>
           </a:p>
           <a:p>
@@ -5416,7 +5416,7 @@
                 <a:ea typeface="PingFang SC"/>
                 <a:cs typeface="PingFang SC"/>
               </a:rPr>
-              <a:t>▸ 跟谁比</a:t>
+              <a:t>▸ 对比基线</a:t>
             </a:r>
           </a:p>
           <a:p>
@@ -5437,7 +5437,7 @@
                 <a:ea typeface="PingFang SC"/>
                 <a:cs typeface="PingFang SC"/>
               </a:rPr>
-              <a:t>• 人工写的规则(现状)、Kgent/KEN(一次合成)、Tetragon/Falco(人工策略)</a:t>
+              <a:t>• 人工编写的规则(现状)、Kgent/KEN(一次性合成)、Tetragon/Falco(人工策略)</a:t>
             </a:r>
           </a:p>
         </p:txBody>
@@ -5580,7 +5580,7 @@
                 <a:ea typeface="PingFang SC"/>
                 <a:cs typeface="PingFang SC"/>
               </a:rPr>
-              <a:t>▸ 一套能跑起来的系统(而非设想):在 PacketScope/Guarder 上落地,让智能体自动维护内核 eBPF 防御,可演示可复现</a:t>
+              <a:t>▸ 可运行的系统原型(而非概念设想):在 PacketScope/Guarder 上落地,由编码智能体自动维护内核 eBPF 防御,可演示、可复现</a:t>
             </a:r>
           </a:p>
           <a:p>
@@ -5601,7 +5601,7 @@
                 <a:ea typeface="PingFang SC"/>
                 <a:cs typeface="PingFang SC"/>
               </a:rPr>
-              <a:t>▸ 智能体写内核代码的可靠流水线:生成→编译→verifier→沙箱→加载→回滚,保证“AI 写的 eBPF”能用、且不把内核搞挂</a:t>
+              <a:t>▸ 智能体编写内核代码的可靠流水线:生成→编译→verifier→沙箱→加载→回滚,保证智能体生成的 eBPF 可用,且不致引发内核崩溃</a:t>
             </a:r>
           </a:p>
           <a:p>
@@ -5622,7 +5622,7 @@
                 <a:ea typeface="PingFang SC"/>
                 <a:cs typeface="PingFang SC"/>
               </a:rPr>
-              <a:t>▸ 真实攻击的防御 + 评测靶场:用 PMTUD/NAT/IPID 等真实攻击,给出检出率/误报/开销,并与人工规则、现有工具对比</a:t>
+              <a:t>▸ 面向真实协议攻击的防御评测靶场:以 PMTUD/NAT/IPID 等真实攻击,给出检测率/误报/开销,并与人工规则、现有工具对比</a:t>
             </a:r>
           </a:p>
         </p:txBody>
@@ -7699,7 +7699,7 @@
                 <a:ea typeface="PingFang SC"/>
                 <a:cs typeface="PingFang SC"/>
               </a:rPr>
-              <a:t>关键挑战(工程上)</a:t>
+              <a:t>关键挑战(工程层面)</a:t>
             </a:r>
           </a:p>
         </p:txBody>
@@ -7743,7 +7743,7 @@
                 <a:ea typeface="PingFang SC"/>
                 <a:cs typeface="PingFang SC"/>
               </a:rPr>
-              <a:t>▸ 可靠性:智能体写的内核代码若有缺陷可断网/误杀 → 先验证安全、再上线,出错能回滚</a:t>
+              <a:t>▸ 可靠性:智能体生成的内核代码若存在缺陷,可能导致网络中断或误伤正常流量 → 先验证安全、再上线,异常可回滚</a:t>
             </a:r>
           </a:p>
           <a:p>
@@ -7764,7 +7764,7 @@
                 <a:ea typeface="PingFang SC"/>
                 <a:cs typeface="PingFang SC"/>
               </a:rPr>
-              <a:t>▸ 生成质量:智能体写的 eBPF 要真能编过、过 verifier、且确实拦住攻击而不误杀</a:t>
+              <a:t>▸ 生成质量:智能体生成的 eBPF 须能编译通过、通过 verifier,并有效拦截攻击而不误伤正常流量</a:t>
             </a:r>
           </a:p>
           <a:p>
@@ -7785,7 +7785,7 @@
                 <a:ea typeface="PingFang SC"/>
                 <a:cs typeface="PingFang SC"/>
               </a:rPr>
-              <a:t>▸ 评测:怎么证明真有用——见过的、没见过的攻击都能防,且开销可接受</a:t>
+              <a:t>▸ 评测:如何验证有效性——对已知与未知攻击均能防御,且性能开销可控</a:t>
             </a:r>
           </a:p>
         </p:txBody>

--- a/keynote/答辩Keynote_李兆曦.pptx
+++ b/keynote/答辩Keynote_李兆曦.pptx
@@ -26,7 +26,6 @@
     <p:sldId id="274" r:id="rId25"/>
     <p:sldId id="275" r:id="rId26"/>
     <p:sldId id="276" r:id="rId27"/>
-    <p:sldId id="277" r:id="rId28"/>
   </p:sldIdLst>
   <p:sldSz cx="12191695" cy="6858000" type="screen4x3"/>
   <p:notesSz cx="6858000" cy="9144000"/>
@@ -4333,7 +4332,7 @@
                 <a:ea typeface="PingFang SC"/>
                 <a:cs typeface="PingFang SC"/>
               </a:rPr>
-              <a:t>主要研究内容(三项)</a:t>
+              <a:t>主要研究内容(两项)</a:t>
             </a:r>
           </a:p>
         </p:txBody>
@@ -4377,7 +4376,7 @@
                 <a:ea typeface="PingFang SC"/>
                 <a:cs typeface="PingFang SC"/>
               </a:rPr>
-              <a:t>▸ 系统构建:智能体与 eBPF 工具链闭环</a:t>
+              <a:t>▸ 一套完整的专用 harness</a:t>
             </a:r>
           </a:p>
           <a:p>
@@ -4398,28 +4397,7 @@
                 <a:ea typeface="PingFang SC"/>
                 <a:cs typeface="PingFang SC"/>
               </a:rPr>
-              <a:t>• 在 PacketScope/Guarder 基础上,构建使智能体能够完成“生成 eBPF→编译→通过 verifier→沙箱测试→加载→读取遥测”的工具链与自动化闭环</a:t>
-            </a:r>
-          </a:p>
-          <a:p>
-            <a:pPr>
-              <a:lnSpc>
-                <a:spcPct val="112000"/>
-              </a:lnSpc>
-              <a:spcAft>
-                <a:spcPts val="600"/>
-              </a:spcAft>
-            </a:pPr>
-            <a:r>
-              <a:rPr sz="1800" b="1">
-                <a:solidFill>
-                  <a:srgbClr val="222222"/>
-                </a:solidFill>
-                <a:latin typeface="PingFang SC"/>
-                <a:ea typeface="PingFang SC"/>
-                <a:cs typeface="PingFang SC"/>
-              </a:rPr>
-              <a:t>▸ 生成“可用且安全”的 eBPF 防御</a:t>
+              <a:t>• 将“由编码智能体生成 eBPF 防御并保证其可用、安全”的全过程封装为完整的领域专用 harness:涵盖生成、编译、内核 verifier 校验、沙箱测试、加载与运行时反馈</a:t>
             </a:r>
           </a:p>
           <a:p>
@@ -4440,7 +4418,7 @@
                 <a:ea typeface="PingFang SC"/>
                 <a:cs typeface="PingFang SC"/>
               </a:rPr>
-              <a:t>• 解决生成质量(可编译、通过 verifier、不误伤正常流量)与运行安全(异常时自动回滚)——系统得以运行的关键工程</a:t>
+              <a:t>• 解决生成质量(可编译、通过 verifier、不误伤正常流量)与运行安全(异常时自动回滚)</a:t>
             </a:r>
           </a:p>
           <a:p>
@@ -5536,7 +5514,7 @@
                 <a:ea typeface="PingFang SC"/>
                 <a:cs typeface="PingFang SC"/>
               </a:rPr>
-              <a:t>创新点</a:t>
+              <a:t>工作计划(2026.06 – 2027.06)</a:t>
             </a:r>
           </a:p>
         </p:txBody>
@@ -5549,8 +5527,8 @@
         </p:nvSpPr>
         <p:spPr>
           <a:xfrm>
-            <a:off x="640080" y="1463040"/>
-            <a:ext cx="9977507604000" cy="4849538688000"/>
+            <a:off x="640080" y="1188720"/>
+            <a:ext cx="9977507604000" cy="2286000"/>
           </a:xfrm>
           <a:prstGeom prst="rect">
             <a:avLst/>
@@ -5572,7 +5550,7 @@
               </a:spcAft>
             </a:pPr>
             <a:r>
-              <a:rPr sz="1900" b="1">
+              <a:rPr sz="1700" b="0">
                 <a:solidFill>
                   <a:srgbClr val="222222"/>
                 </a:solidFill>
@@ -5580,7 +5558,7 @@
                 <a:ea typeface="PingFang SC"/>
                 <a:cs typeface="PingFang SC"/>
               </a:rPr>
-              <a:t>▸ 可运行的系统原型(而非概念设想):在 PacketScope/Guarder 上落地,由编码智能体自动维护内核 eBPF 防御,可演示、可复现</a:t>
+              <a:t>▸ 2026.07–09:防御演化框架原型(形式化 + 系统骨架)</a:t>
             </a:r>
           </a:p>
           <a:p>
@@ -5593,7 +5571,7 @@
               </a:spcAft>
             </a:pPr>
             <a:r>
-              <a:rPr sz="1900" b="1">
+              <a:rPr sz="1700" b="0">
                 <a:solidFill>
                   <a:srgbClr val="222222"/>
                 </a:solidFill>
@@ -5601,7 +5579,7 @@
                 <a:ea typeface="PingFang SC"/>
                 <a:cs typeface="PingFang SC"/>
               </a:rPr>
-              <a:t>▸ 智能体编写内核代码的可靠流水线:生成→编译→verifier→沙箱→加载→回滚,保证智能体生成的 eBPF 可用,且不致引发内核崩溃</a:t>
+              <a:t>▸ 2026.10–12:闭环原型 + 初步实验(探索/合成/验证/部署/档案)</a:t>
             </a:r>
           </a:p>
           <a:p>
@@ -5614,7 +5592,7 @@
               </a:spcAft>
             </a:pPr>
             <a:r>
-              <a:rPr sz="1900" b="1">
+              <a:rPr sz="1700" b="0">
                 <a:solidFill>
                   <a:srgbClr val="222222"/>
                 </a:solidFill>
@@ -5622,11 +5600,56 @@
                 <a:ea typeface="PingFang SC"/>
                 <a:cs typeface="PingFang SC"/>
               </a:rPr>
-              <a:t>▸ 面向真实协议攻击的防御评测靶场:以 PMTUD/NAT/IPID 等真实攻击,给出检测率/误报/开销,并与人工规则、现有工具对比</a:t>
-            </a:r>
-          </a:p>
-        </p:txBody>
-      </p:sp>
+              <a:t>▸ 2027.01–03:评测 + 对比实验 + 中期检查</a:t>
+            </a:r>
+          </a:p>
+          <a:p>
+            <a:pPr>
+              <a:lnSpc>
+                <a:spcPct val="112000"/>
+              </a:lnSpc>
+              <a:spcAft>
+                <a:spcPts val="600"/>
+              </a:spcAft>
+            </a:pPr>
+            <a:r>
+              <a:rPr sz="1700" b="0">
+                <a:solidFill>
+                  <a:srgbClr val="222222"/>
+                </a:solidFill>
+                <a:latin typeface="PingFang SC"/>
+                <a:ea typeface="PingFang SC"/>
+                <a:cs typeface="PingFang SC"/>
+              </a:rPr>
+              <a:t>▸ 2027.04–05:论文撰写、预答辩、送审　|　2027.06:答辩</a:t>
+            </a:r>
+          </a:p>
+        </p:txBody>
+      </p:sp>
+      <p:pic>
+        <p:nvPicPr>
+          <p:cNvPr id="5" name="Picture 4" descr="gantt.png"/>
+          <p:cNvPicPr>
+            <a:picLocks noChangeAspect="1"/>
+          </p:cNvPicPr>
+          <p:nvPr/>
+        </p:nvPicPr>
+        <p:blipFill>
+          <a:blip r:embed="rId2"/>
+          <a:stretch>
+            <a:fillRect/>
+          </a:stretch>
+        </p:blipFill>
+        <p:spPr>
+          <a:xfrm>
+            <a:off x="3847005" y="4206240"/>
+            <a:ext cx="4497685" cy="2011680"/>
+          </a:xfrm>
+          <a:prstGeom prst="rect">
+            <a:avLst/>
+          </a:prstGeom>
+        </p:spPr>
+      </p:pic>
     </p:spTree>
   </p:cSld>
   <p:clrMapOvr>
@@ -6011,7 +6034,7 @@
                 <a:ea typeface="PingFang SC"/>
                 <a:cs typeface="PingFang SC"/>
               </a:rPr>
-              <a:t>工作计划(2026.06 – 2027.06)</a:t>
+              <a:t>预期成果</a:t>
             </a:r>
           </a:p>
         </p:txBody>
@@ -6025,7 +6048,7 @@
         <p:spPr>
           <a:xfrm>
             <a:off x="640080" y="1188720"/>
-            <a:ext cx="9977507604000" cy="2286000"/>
+            <a:ext cx="9977507604000" cy="4849538688000"/>
           </a:xfrm>
           <a:prstGeom prst="rect">
             <a:avLst/>
@@ -6047,7 +6070,7 @@
               </a:spcAft>
             </a:pPr>
             <a:r>
-              <a:rPr sz="1700" b="0">
+              <a:rPr sz="1800" b="1">
                 <a:solidFill>
                   <a:srgbClr val="222222"/>
                 </a:solidFill>
@@ -6055,7 +6078,7 @@
                 <a:ea typeface="PingFang SC"/>
                 <a:cs typeface="PingFang SC"/>
               </a:rPr>
-              <a:t>▸ 2026.07–09:防御演化框架原型(形式化 + 系统骨架)</a:t>
+              <a:t>▸ 学位论文:完成硕士学位论文 1 篇</a:t>
             </a:r>
           </a:p>
           <a:p>
@@ -6068,7 +6091,7 @@
               </a:spcAft>
             </a:pPr>
             <a:r>
-              <a:rPr sz="1700" b="0">
+              <a:rPr sz="1800" b="1">
                 <a:solidFill>
                   <a:srgbClr val="222222"/>
                 </a:solidFill>
@@ -6076,7 +6099,7 @@
                 <a:ea typeface="PingFang SC"/>
                 <a:cs typeface="PingFang SC"/>
               </a:rPr>
-              <a:t>▸ 2026.10–12:闭环原型 + 初步实验(探索/合成/验证/部署/档案)</a:t>
+              <a:t>▸ 开源系统:自进化 eBPF 防御系统、防御演化专用 harness、攻防评测基准</a:t>
             </a:r>
           </a:p>
           <a:p>
@@ -6089,7 +6112,7 @@
               </a:spcAft>
             </a:pPr>
             <a:r>
-              <a:rPr sz="1700" b="0">
+              <a:rPr sz="1800" b="1">
                 <a:solidFill>
                   <a:srgbClr val="222222"/>
                 </a:solidFill>
@@ -6097,56 +6120,11 @@
                 <a:ea typeface="PingFang SC"/>
                 <a:cs typeface="PingFang SC"/>
               </a:rPr>
-              <a:t>▸ 2027.01–03:评测 + 对比实验 + 中期检查</a:t>
-            </a:r>
-          </a:p>
-          <a:p>
-            <a:pPr>
-              <a:lnSpc>
-                <a:spcPct val="112000"/>
-              </a:lnSpc>
-              <a:spcAft>
-                <a:spcPts val="600"/>
-              </a:spcAft>
-            </a:pPr>
-            <a:r>
-              <a:rPr sz="1700" b="0">
-                <a:solidFill>
-                  <a:srgbClr val="222222"/>
-                </a:solidFill>
-                <a:latin typeface="PingFang SC"/>
-                <a:ea typeface="PingFang SC"/>
-                <a:cs typeface="PingFang SC"/>
-              </a:rPr>
-              <a:t>▸ 2027.04–05:论文撰写、预答辩、送审　|　2027.06:答辩</a:t>
-            </a:r>
-          </a:p>
-        </p:txBody>
-      </p:sp>
-      <p:pic>
-        <p:nvPicPr>
-          <p:cNvPr id="5" name="Picture 4" descr="gantt.png"/>
-          <p:cNvPicPr>
-            <a:picLocks noChangeAspect="1"/>
-          </p:cNvPicPr>
-          <p:nvPr/>
-        </p:nvPicPr>
-        <p:blipFill>
-          <a:blip r:embed="rId2"/>
-          <a:stretch>
-            <a:fillRect/>
-          </a:stretch>
-        </p:blipFill>
-        <p:spPr>
-          <a:xfrm>
-            <a:off x="3847005" y="4206240"/>
-            <a:ext cx="4497685" cy="2011680"/>
-          </a:xfrm>
-          <a:prstGeom prst="rect">
-            <a:avLst/>
-          </a:prstGeom>
-        </p:spPr>
-      </p:pic>
+              <a:t>▸ 社区贡献:对发现的协议/实现缺陷,向 IETF / Linux 负责任披露</a:t>
+            </a:r>
+          </a:p>
+        </p:txBody>
+      </p:sp>
     </p:spTree>
   </p:cSld>
   <p:clrMapOvr>
@@ -6174,191 +6152,6 @@
         <p:spPr>
           <a:xfrm>
             <a:off x="0" y="0"/>
-            <a:ext cx="12191695" cy="932688"/>
-          </a:xfrm>
-          <a:prstGeom prst="rect">
-            <a:avLst/>
-          </a:prstGeom>
-          <a:solidFill>
-            <a:srgbClr val="743481"/>
-          </a:solidFill>
-          <a:ln>
-            <a:noFill/>
-          </a:ln>
-          <a:effectLst/>
-        </p:spPr>
-        <p:style>
-          <a:lnRef idx="1">
-            <a:schemeClr val="accent1"/>
-          </a:lnRef>
-          <a:fillRef idx="3">
-            <a:schemeClr val="accent1"/>
-          </a:fillRef>
-          <a:effectRef idx="2">
-            <a:schemeClr val="accent1"/>
-          </a:effectRef>
-          <a:fontRef idx="minor">
-            <a:schemeClr val="lt1"/>
-          </a:fontRef>
-        </p:style>
-        <p:txBody>
-          <a:bodyPr rtlCol="0" anchor="ctr"/>
-          <a:lstStyle/>
-          <a:p>
-            <a:pPr algn="ctr"/>
-          </a:p>
-        </p:txBody>
-      </p:sp>
-      <p:sp>
-        <p:nvSpPr>
-          <p:cNvPr id="3" name="TextBox 2"/>
-          <p:cNvSpPr txBox="1"/>
-          <p:nvPr/>
-        </p:nvSpPr>
-        <p:spPr>
-          <a:xfrm>
-            <a:off x="502920" y="109728"/>
-            <a:ext cx="11185855" cy="731520"/>
-          </a:xfrm>
-          <a:prstGeom prst="rect">
-            <a:avLst/>
-          </a:prstGeom>
-          <a:noFill/>
-        </p:spPr>
-        <p:txBody>
-          <a:bodyPr wrap="square" anchor="ctr">
-            <a:spAutoFit/>
-          </a:bodyPr>
-          <a:lstStyle/>
-          <a:p>
-            <a:pPr algn="l"/>
-            <a:r>
-              <a:rPr sz="2600" b="1">
-                <a:solidFill>
-                  <a:srgbClr val="FFFFFF"/>
-                </a:solidFill>
-                <a:latin typeface="PingFang SC"/>
-                <a:ea typeface="PingFang SC"/>
-                <a:cs typeface="PingFang SC"/>
-              </a:rPr>
-              <a:t>预期成果</a:t>
-            </a:r>
-          </a:p>
-        </p:txBody>
-      </p:sp>
-      <p:sp>
-        <p:nvSpPr>
-          <p:cNvPr id="4" name="TextBox 3"/>
-          <p:cNvSpPr txBox="1"/>
-          <p:nvPr/>
-        </p:nvSpPr>
-        <p:spPr>
-          <a:xfrm>
-            <a:off x="640080" y="1188720"/>
-            <a:ext cx="9977507604000" cy="4849538688000"/>
-          </a:xfrm>
-          <a:prstGeom prst="rect">
-            <a:avLst/>
-          </a:prstGeom>
-          <a:noFill/>
-        </p:spPr>
-        <p:txBody>
-          <a:bodyPr wrap="square">
-            <a:spAutoFit/>
-          </a:bodyPr>
-          <a:lstStyle/>
-          <a:p>
-            <a:pPr>
-              <a:lnSpc>
-                <a:spcPct val="112000"/>
-              </a:lnSpc>
-              <a:spcAft>
-                <a:spcPts val="600"/>
-              </a:spcAft>
-            </a:pPr>
-            <a:r>
-              <a:rPr sz="1800" b="1">
-                <a:solidFill>
-                  <a:srgbClr val="222222"/>
-                </a:solidFill>
-                <a:latin typeface="PingFang SC"/>
-                <a:ea typeface="PingFang SC"/>
-                <a:cs typeface="PingFang SC"/>
-              </a:rPr>
-              <a:t>▸ 学位论文:完成硕士学位论文 1 篇</a:t>
-            </a:r>
-          </a:p>
-          <a:p>
-            <a:pPr>
-              <a:lnSpc>
-                <a:spcPct val="112000"/>
-              </a:lnSpc>
-              <a:spcAft>
-                <a:spcPts val="600"/>
-              </a:spcAft>
-            </a:pPr>
-            <a:r>
-              <a:rPr sz="1800" b="1">
-                <a:solidFill>
-                  <a:srgbClr val="222222"/>
-                </a:solidFill>
-                <a:latin typeface="PingFang SC"/>
-                <a:ea typeface="PingFang SC"/>
-                <a:cs typeface="PingFang SC"/>
-              </a:rPr>
-              <a:t>▸ 开源系统:自进化 eBPF 防御系统、防御演化专用 harness、攻防评测基准</a:t>
-            </a:r>
-          </a:p>
-          <a:p>
-            <a:pPr>
-              <a:lnSpc>
-                <a:spcPct val="112000"/>
-              </a:lnSpc>
-              <a:spcAft>
-                <a:spcPts val="600"/>
-              </a:spcAft>
-            </a:pPr>
-            <a:r>
-              <a:rPr sz="1800" b="1">
-                <a:solidFill>
-                  <a:srgbClr val="222222"/>
-                </a:solidFill>
-                <a:latin typeface="PingFang SC"/>
-                <a:ea typeface="PingFang SC"/>
-                <a:cs typeface="PingFang SC"/>
-              </a:rPr>
-              <a:t>▸ 社区贡献:对发现的协议/实现缺陷,向 IETF / Linux 负责任披露</a:t>
-            </a:r>
-          </a:p>
-        </p:txBody>
-      </p:sp>
-    </p:spTree>
-  </p:cSld>
-  <p:clrMapOvr>
-    <a:masterClrMapping/>
-  </p:clrMapOvr>
-</p:sld>
-</file>
-
-<file path=ppt/slides/slide22.xml><?xml version="1.0" encoding="utf-8"?>
-<p:sld xmlns:a="http://schemas.openxmlformats.org/drawingml/2006/main" xmlns:p="http://schemas.openxmlformats.org/presentationml/2006/main" xmlns:r="http://schemas.openxmlformats.org/officeDocument/2006/relationships">
-  <p:cSld>
-    <p:spTree>
-      <p:nvGrpSpPr>
-        <p:cNvPr id="1" name=""/>
-        <p:cNvGrpSpPr/>
-        <p:nvPr/>
-      </p:nvGrpSpPr>
-      <p:grpSpPr/>
-      <p:sp>
-        <p:nvSpPr>
-          <p:cNvPr id="2" name="Rectangle 1"/>
-          <p:cNvSpPr/>
-          <p:nvPr/>
-        </p:nvSpPr>
-        <p:spPr>
-          <a:xfrm>
-            <a:off x="0" y="0"/>
             <a:ext cx="12191695" cy="6858000"/>
           </a:xfrm>
           <a:prstGeom prst="rect">
@@ -7699,7 +7492,7 @@
                 <a:ea typeface="PingFang SC"/>
                 <a:cs typeface="PingFang SC"/>
               </a:rPr>
-              <a:t>关键挑战(工程层面)</a:t>
+              <a:t>关键挑战</a:t>
             </a:r>
           </a:p>
         </p:txBody>
